--- a/Deliverables/CapstoneExpoDraft.pptx
+++ b/Deliverables/CapstoneExpoDraft.pptx
@@ -5224,21 +5224,21 @@
           <p:nvPr>
             <p:extLst>
               <p:ext uri="{D42A27DB-BD31-4B8C-83A1-F6EECF244321}">
-                <p14:modId xmlns:p14="http://schemas.microsoft.com/office/powerpoint/2010/main" val="1190207180"/>
+                <p14:modId xmlns:p14="http://schemas.microsoft.com/office/powerpoint/2010/main" val="2746486991"/>
               </p:ext>
             </p:extLst>
           </p:nvPr>
         </p:nvGraphicFramePr>
         <p:xfrm>
-          <a:off x="29675141" y="6709920"/>
-          <a:ext cx="11429568" cy="23228065"/>
+          <a:off x="29278901" y="6455219"/>
+          <a:ext cx="11593286" cy="14239240"/>
         </p:xfrm>
         <a:graphic>
           <a:graphicData uri="http://schemas.openxmlformats.org/drawingml/2006/table">
             <a:tbl>
               <a:tblPr/>
               <a:tblGrid>
-                <a:gridCol w="11429568">
+                <a:gridCol w="11593286">
                   <a:extLst>
                     <a:ext uri="{9D8B030D-6E8A-4147-A177-3AD203B41FA5}">
                       <a16:colId xmlns:a16="http://schemas.microsoft.com/office/drawing/2014/main" val="2659221207"/>
@@ -5246,7 +5246,7 @@
                   </a:extLst>
                 </a:gridCol>
               </a:tblGrid>
-              <a:tr h="23228065">
+              <a:tr h="13948443">
                 <a:tc>
                   <a:txBody>
                     <a:bodyPr/>
@@ -7169,10 +7169,10 @@
       </p:sp>
       <p:pic>
         <p:nvPicPr>
-          <p:cNvPr id="10" name="Picture 9">
+          <p:cNvPr id="13" name="Picture 12">
             <a:extLst>
               <a:ext uri="{FF2B5EF4-FFF2-40B4-BE49-F238E27FC236}">
-                <a16:creationId xmlns:a16="http://schemas.microsoft.com/office/drawing/2014/main" id="{316BF65B-4F0F-B606-7703-CB284326C075}"/>
+                <a16:creationId xmlns:a16="http://schemas.microsoft.com/office/drawing/2014/main" id="{72FEF95C-838F-596E-CD22-938C7AD6D3BA}"/>
               </a:ext>
             </a:extLst>
           </p:cNvPr>
@@ -7189,24 +7189,12 @@
         </p:blipFill>
         <p:spPr>
           <a:xfrm>
-            <a:off x="1886266" y="22898416"/>
-            <a:ext cx="24909332" cy="7005630"/>
+            <a:off x="2742669" y="23144009"/>
+            <a:ext cx="32192121" cy="7068513"/>
           </a:xfrm>
           <a:prstGeom prst="rect">
             <a:avLst/>
           </a:prstGeom>
-          <a:ln w="228600" cap="sq" cmpd="thickThin">
-            <a:solidFill>
-              <a:srgbClr val="000000"/>
-            </a:solidFill>
-            <a:prstDash val="solid"/>
-            <a:miter lim="800000"/>
-          </a:ln>
-          <a:effectLst>
-            <a:innerShdw blurRad="76200">
-              <a:srgbClr val="000000"/>
-            </a:innerShdw>
-          </a:effectLst>
         </p:spPr>
       </p:pic>
     </p:spTree>
